--- a/media/resources/files/Ekvivalenettuuluk_BOP_BaylanyshOyunu.pptx
+++ b/media/resources/files/Ekvivalenettuuluk_BOP_BaylanyshOyunu.pptx
@@ -15930,7 +15930,7 @@
             </a:pPr>
             <a:r>
               <a:rPr lang="ru-RU" sz="3200" dirty="0"/>
-              <a:t>Турдуу пикирлер учун ыраазычылык билдиребиз.</a:t>
+              <a:t>Түрдүү пикирлер үчүн ыраазычылык билдиребиз.</a:t>
             </a:r>
           </a:p>
           <a:p>

--- a/media/resources/files/Ekvivalenettuuluk_BOP_BaylanyshOyunu.pptx
+++ b/media/resources/files/Ekvivalenettuuluk_BOP_BaylanyshOyunu.pptx
@@ -1157,7 +1157,7 @@
           <a:p>
             <a:r>
               <a:rPr lang="ru-RU" dirty="0"/>
-              <a:t>Бул ресурс математикалык ыкманын жандуу демонстрацияларын камсыз кылат.</a:t>
+              <a:t>Бул ресурс ыкманы жандуу көрсөтөт.</a:t>
             </a:r>
           </a:p>
           <a:p>
@@ -16549,7 +16549,7 @@
             <a:pPr algn="ctr"/>
             <a:r>
               <a:rPr lang="ru-RU" sz="2000" dirty="0"/>
-              <a:t>Бул карталар ар түрдүү атаандаштык жана биргелешкен оюндарда колдонулушу мүмкүн.</a:t>
+              <a:t>Бул карталар жарышта да, бирге ойногондо да колдонулат.</a:t>
             </a:r>
           </a:p>
           <a:p>
@@ -16560,7 +16560,7 @@
             <a:pPr algn="ctr"/>
             <a:r>
               <a:rPr lang="ru-RU" sz="2000" dirty="0"/>
-              <a:t>Студенттердин топтору (2+) карталардын бир топтомун колдонушат жана эң жакшы эки картаны айлантышат. Бул карталар бөлүшкөн терминди биринчи аныктаган оюнчу бир картаны сактайт. Жаңы карта бул картаны алмаштырат жана кайрадан студенттер дал келген терминди табышы керек. Аягында эң көп карта бар студент жеңет! (Эгер карталардын бири дайыма сакталып турса, оюн жеңилирээк болот.)</a:t>
+              <a:t>Окуучулар (2+) бир топтом карта менен ойношот. Эки картаны ачышат. Орток терминди биринчи тапкан окуучу бир картаны алат. Анын ордуна жаңы карта коюлат, анан дал келген терминди кайра издешет. Эң көп картасы бар окуучу жеңет. (Бир карта дайыма кала берсе, оюн жеңилирээк.)</a:t>
             </a:r>
           </a:p>
           <a:p>
@@ -16571,7 +16571,7 @@
             <a:pPr algn="ctr"/>
             <a:r>
               <a:rPr lang="ru-RU" sz="2000" dirty="0"/>
-              <a:t>Студенттердин топтору (2+) баштапкы картаны коюп, калганын ортосуна бөлүштүрүшөт. Студенттер баштапкы картага дал келүү үчүн жогорку картасын гана карашат. Дал келүүнү билдиргенден кийин студент өзүнүн картасын старттык картага кое алат. Эми бардык оюнчулар жогорку картасын бул жаңы картага дал келтириши керек. Бардык карталарынан кутулуу менен утуп алган студенттер бардык карталар ойнолмоюнча башка оюнчуларга жардам бере алышат.</a:t>
+              <a:t>Окуучулар (2+) бир картаны ортого коюп, калганын бөлүшөт. Ар ким үстүнкү картасын гана карап, ортодогу картага дал келтирет. Дал келсе, өз картасын үстүнө коёт. Эми баары жаңы картага дал келтирет. Картасы түгөнгөн окуучу калгандарга жардам берет, карта бүткөнчө.</a:t>
             </a:r>
           </a:p>
           <a:p>
@@ -16882,14 +16882,14 @@
             <a:pPr algn="ctr"/>
             <a:r>
               <a:rPr lang="ru-RU" sz="2000" dirty="0"/>
-              <a:t>Жеке адамдар/студенттердин топтору карталарды домино ташы катары колдоно алышат, анткени ар бир карта башка каалаган карта менен байланыштырылышы мүмкүн.</a:t>
+              <a:t>Окуучулар же топтор картаны домино ташындай колдонот: ар бир карта башка каалаган карта менен уланат.</a:t>
             </a:r>
           </a:p>
           <a:p>
             <a:pPr algn="ctr"/>
             <a:r>
               <a:rPr lang="ru-RU" sz="2000" dirty="0"/>
-              <a:t>Студенттерге сапка коюлганда ар бир жуп карталардын ортосунда кандай терминдер бөлүшүлгөнүн белгилөө маанилүү.</a:t>
+              <a:t>Окуучулар катар койгондо, эки картанын ортосундагы орток терминди белгилеши керек.</a:t>
             </a:r>
           </a:p>
           <a:p>
@@ -16907,7 +16907,7 @@
             <a:pPr algn="ctr"/>
             <a:r>
               <a:rPr lang="ru-RU" sz="2000" dirty="0"/>
-              <a:t>Карталардын бир нече + жарым-жартылай комплекттери викторина-викторина-соода карталары катары колдонулушу мүмкүн. Студенттер өз картасын башка студенттер менен салыштырып, дал келген терминди таба алышат. Студенттер андан кийин карталарды алмаштырып, экинчи студентти таба алышат. Атаандаштыкта, студенттер убакыттын чегинде жетишилген матчтардын жана алмашуулардын санын жаза алышат..</a:t>
+              <a:t>Картанын толук же жарым топтомун «суроо–суроо–алмаш» оюнуна колдонсо болот. Окуучу өз картасын башкасыныкы менен салыштырып, дал келген терминди табат. Анан карта алмашып, башка окуучуну табат. Жарышта убакыт ичинде канча жолу дал келгенин жана алмашканын жазышат.</a:t>
             </a:r>
           </a:p>
           <a:p>
